--- a/docs/Adaptive-Offers-Pitch-Grupo74.pptx
+++ b/docs/Adaptive-Offers-Pitch-Grupo74.pptx
@@ -7661,7 +7661,7 @@
                 <a:ea typeface="Calibri" pitchFamily="34" charset="-122"/>
                 <a:cs typeface="Calibri" pitchFamily="34" charset="-120"/>
               </a:rPr>
-              <a:t>93 testes (unit + integração)</a:t>
+              <a:t>95 testes (unit + integração)</a:t>
             </a:r>
             <a:endParaRPr lang="en-US" sz="1250" dirty="0"/>
           </a:p>
